--- a/docs/pptx/whole/ritu-egfr-ratio-hist.pptx
+++ b/docs/pptx/whole/ritu-egfr-ratio-hist.pptx
@@ -2271,7 +2271,7 @@
           </p:nvSpPr>
           <p:spPr>
             <a:xfrm>
-              <a:off x="994649" y="5037443"/>
+              <a:off x="994649" y="5038714"/>
               <a:ext cx="7603582" cy="0"/>
             </a:xfrm>
             <a:custGeom>
@@ -2314,7 +2314,7 @@
           </p:nvSpPr>
           <p:spPr>
             <a:xfrm>
-              <a:off x="994649" y="4216227"/>
+              <a:off x="994649" y="4220041"/>
               <a:ext cx="7603582" cy="0"/>
             </a:xfrm>
             <a:custGeom>
@@ -2357,7 +2357,7 @@
           </p:nvSpPr>
           <p:spPr>
             <a:xfrm>
-              <a:off x="994649" y="3395012"/>
+              <a:off x="994649" y="3401368"/>
               <a:ext cx="7603582" cy="0"/>
             </a:xfrm>
             <a:custGeom>
@@ -2400,7 +2400,7 @@
           </p:nvSpPr>
           <p:spPr>
             <a:xfrm>
-              <a:off x="994649" y="2573796"/>
+              <a:off x="994649" y="2582695"/>
               <a:ext cx="7603582" cy="0"/>
             </a:xfrm>
             <a:custGeom>
@@ -2787,7 +2787,7 @@
           </p:nvSpPr>
           <p:spPr>
             <a:xfrm>
-              <a:off x="994649" y="4626835"/>
+              <a:off x="994649" y="4629378"/>
               <a:ext cx="7603582" cy="0"/>
             </a:xfrm>
             <a:custGeom>
@@ -2830,7 +2830,7 @@
           </p:nvSpPr>
           <p:spPr>
             <a:xfrm>
-              <a:off x="994649" y="3805620"/>
+              <a:off x="994649" y="3810705"/>
               <a:ext cx="7603582" cy="0"/>
             </a:xfrm>
             <a:custGeom>
@@ -2873,7 +2873,7 @@
           </p:nvSpPr>
           <p:spPr>
             <a:xfrm>
-              <a:off x="994649" y="2984404"/>
+              <a:off x="994649" y="2992031"/>
               <a:ext cx="7603582" cy="0"/>
             </a:xfrm>
             <a:custGeom>
@@ -2916,7 +2916,7 @@
           </p:nvSpPr>
           <p:spPr>
             <a:xfrm>
-              <a:off x="994649" y="2163189"/>
+              <a:off x="994649" y="2173358"/>
               <a:ext cx="7603582" cy="0"/>
             </a:xfrm>
             <a:custGeom>
@@ -3287,8 +3287,8 @@
           </p:nvSpPr>
           <p:spPr>
             <a:xfrm>
-              <a:off x="2492324" y="4125970"/>
-              <a:ext cx="576029" cy="1322080"/>
+              <a:off x="2492324" y="4176819"/>
+              <a:ext cx="576029" cy="1271231"/>
             </a:xfrm>
             <a:prstGeom prst="rect">
               <a:avLst/>
@@ -4146,7 +4146,7 @@
           </p:nvSpPr>
           <p:spPr>
             <a:xfrm>
-              <a:off x="835933" y="4575857"/>
+              <a:off x="835933" y="4578400"/>
               <a:ext cx="79004" cy="101955"/>
             </a:xfrm>
             <a:prstGeom prst="rect">
@@ -4192,7 +4192,7 @@
           </p:nvSpPr>
           <p:spPr>
             <a:xfrm>
-              <a:off x="756929" y="3754642"/>
+              <a:off x="756929" y="3759727"/>
               <a:ext cx="158008" cy="101955"/>
             </a:xfrm>
             <a:prstGeom prst="rect">
@@ -4238,7 +4238,7 @@
           </p:nvSpPr>
           <p:spPr>
             <a:xfrm>
-              <a:off x="756929" y="2933426"/>
+              <a:off x="756929" y="2941054"/>
               <a:ext cx="158008" cy="101955"/>
             </a:xfrm>
             <a:prstGeom prst="rect">
@@ -4284,7 +4284,7 @@
           </p:nvSpPr>
           <p:spPr>
             <a:xfrm>
-              <a:off x="756929" y="2112211"/>
+              <a:off x="756929" y="2122381"/>
               <a:ext cx="158008" cy="101955"/>
             </a:xfrm>
             <a:prstGeom prst="rect">
